--- a/docs/SIH2026-Highlanders-IPsec-Sentinel.pptx
+++ b/docs/SIH2026-Highlanders-IPsec-Sentinel.pptx
@@ -3721,8 +3721,8 @@
         </p:nvSpPr>
         <p:spPr>
           <a:xfrm>
-            <a:off x="101600" y="1168400"/>
-            <a:ext cx="11988800" cy="508000"/>
+            <a:off x="279400" y="1168400"/>
+            <a:ext cx="11811000" cy="508000"/>
           </a:xfrm>
           <a:prstGeom prst="rect">
             <a:avLst/>
@@ -3844,7 +3844,7 @@
           <a:bodyPr rtlCol="0" anchor="t" wrap="square" lIns="114300" rIns="114300" tIns="76200" bIns="76200"/>
           <a:lstStyle/>
           <a:p>
-            <a:pPr algn="ctr"/>
+            <a:pPr algn="l"/>
             <a:r>
               <a:rPr sz="1250" b="1" u="sng">
                 <a:solidFill>
@@ -3856,7 +3856,7 @@
             </a:r>
           </a:p>
           <a:p>
-            <a:pPr>
+            <a:pPr algn="l">
               <a:spcBef>
                 <a:spcPts val="300"/>
               </a:spcBef>
@@ -3917,7 +3917,7 @@
           <a:bodyPr rtlCol="0" anchor="t" wrap="square" lIns="114300" rIns="114300" tIns="76200" bIns="76200"/>
           <a:lstStyle/>
           <a:p>
-            <a:pPr algn="ctr"/>
+            <a:pPr algn="l"/>
             <a:r>
               <a:rPr sz="1250" b="1" u="sng">
                 <a:solidFill>
@@ -3929,7 +3929,7 @@
             </a:r>
           </a:p>
           <a:p>
-            <a:pPr>
+            <a:pPr algn="l">
               <a:spcBef>
                 <a:spcPts val="300"/>
               </a:spcBef>
@@ -3990,7 +3990,7 @@
           <a:bodyPr rtlCol="0" anchor="t" wrap="square" lIns="114300" rIns="114300" tIns="76200" bIns="76200"/>
           <a:lstStyle/>
           <a:p>
-            <a:pPr algn="ctr"/>
+            <a:pPr algn="l"/>
             <a:r>
               <a:rPr sz="1250" b="1" u="sng">
                 <a:solidFill>
@@ -4002,7 +4002,7 @@
             </a:r>
           </a:p>
           <a:p>
-            <a:pPr>
+            <a:pPr algn="l">
               <a:spcBef>
                 <a:spcPts val="300"/>
               </a:spcBef>
@@ -4364,8 +4364,8 @@
         </p:nvSpPr>
         <p:spPr>
           <a:xfrm>
-            <a:off x="101600" y="1168400"/>
-            <a:ext cx="11988800" cy="508000"/>
+            <a:off x="279400" y="1168400"/>
+            <a:ext cx="11811000" cy="508000"/>
           </a:xfrm>
           <a:prstGeom prst="rect">
             <a:avLst/>
@@ -4460,7 +4460,7 @@
         <p:spPr>
           <a:xfrm>
             <a:off x="101600" y="1803400"/>
-            <a:ext cx="7112000" cy="4047067"/>
+            <a:ext cx="7264400" cy="2862844"/>
           </a:xfrm>
           <a:prstGeom prst="rect">
             <a:avLst/>
@@ -4483,8 +4483,8 @@
         </p:blipFill>
         <p:spPr>
           <a:xfrm>
-            <a:off x="7366000" y="1803400"/>
-            <a:ext cx="4724400" cy="3608917"/>
+            <a:off x="7569200" y="1803400"/>
+            <a:ext cx="4521200" cy="3453694"/>
           </a:xfrm>
           <a:prstGeom prst="rect">
             <a:avLst/>
@@ -4499,8 +4499,8 @@
         </p:nvSpPr>
         <p:spPr>
           <a:xfrm>
-            <a:off x="7366000" y="4013200"/>
-            <a:ext cx="4724400" cy="508000"/>
+            <a:off x="7569200" y="5384800"/>
+            <a:ext cx="4521200" cy="330200"/>
           </a:xfrm>
           <a:prstGeom prst="rect">
             <a:avLst/>
@@ -4538,8 +4538,8 @@
         </p:nvSpPr>
         <p:spPr>
           <a:xfrm>
-            <a:off x="7366000" y="4419600"/>
-            <a:ext cx="2260600" cy="406400"/>
+            <a:off x="101600" y="5105400"/>
+            <a:ext cx="1752600" cy="381000"/>
           </a:xfrm>
           <a:prstGeom prst="roundRect">
             <a:avLst>
@@ -4578,7 +4578,7 @@
               </a:spcAft>
             </a:pPr>
             <a:r>
-              <a:rPr sz="1000" b="1" i="0" u="none">
+              <a:rPr sz="950" b="1" i="0" u="none">
                 <a:solidFill>
                   <a:srgbClr val="FFFFFF"/>
                 </a:solidFill>
@@ -4597,8 +4597,8 @@
         </p:nvSpPr>
         <p:spPr>
           <a:xfrm>
-            <a:off x="9779000" y="4419600"/>
-            <a:ext cx="2260600" cy="406400"/>
+            <a:off x="1930400" y="5105400"/>
+            <a:ext cx="1752600" cy="381000"/>
           </a:xfrm>
           <a:prstGeom prst="roundRect">
             <a:avLst>
@@ -4637,7 +4637,7 @@
               </a:spcAft>
             </a:pPr>
             <a:r>
-              <a:rPr sz="1000" b="1" i="0" u="none">
+              <a:rPr sz="950" b="1" i="0" u="none">
                 <a:solidFill>
                   <a:srgbClr val="FFFFFF"/>
                 </a:solidFill>
@@ -4656,8 +4656,8 @@
         </p:nvSpPr>
         <p:spPr>
           <a:xfrm>
-            <a:off x="7366000" y="4927600"/>
-            <a:ext cx="2260600" cy="406400"/>
+            <a:off x="3759200" y="5105400"/>
+            <a:ext cx="1752600" cy="381000"/>
           </a:xfrm>
           <a:prstGeom prst="roundRect">
             <a:avLst>
@@ -4696,7 +4696,7 @@
               </a:spcAft>
             </a:pPr>
             <a:r>
-              <a:rPr sz="1000" b="1" i="0" u="none">
+              <a:rPr sz="950" b="1" i="0" u="none">
                 <a:solidFill>
                   <a:srgbClr val="FFFFFF"/>
                 </a:solidFill>
@@ -4715,8 +4715,8 @@
         </p:nvSpPr>
         <p:spPr>
           <a:xfrm>
-            <a:off x="9779000" y="4927600"/>
-            <a:ext cx="2260600" cy="406400"/>
+            <a:off x="5588000" y="5105400"/>
+            <a:ext cx="1752600" cy="381000"/>
           </a:xfrm>
           <a:prstGeom prst="roundRect">
             <a:avLst>
@@ -4755,7 +4755,7 @@
               </a:spcAft>
             </a:pPr>
             <a:r>
-              <a:rPr sz="1000" b="1" i="0" u="none">
+              <a:rPr sz="950" b="1" i="0" u="none">
                 <a:solidFill>
                   <a:srgbClr val="FFFFFF"/>
                 </a:solidFill>
@@ -4774,8 +4774,8 @@
         </p:nvSpPr>
         <p:spPr>
           <a:xfrm>
-            <a:off x="101600" y="4648200"/>
-            <a:ext cx="7112000" cy="939800"/>
+            <a:off x="101600" y="5613400"/>
+            <a:ext cx="7264400" cy="685800"/>
           </a:xfrm>
           <a:prstGeom prst="roundRect">
             <a:avLst>
@@ -4810,7 +4810,7 @@
           <a:bodyPr rtlCol="0" anchor="t" wrap="square" lIns="114300" rIns="114300" tIns="76200" bIns="76200"/>
           <a:lstStyle/>
           <a:p>
-            <a:pPr algn="ctr"/>
+            <a:pPr algn="l"/>
             <a:r>
               <a:rPr sz="1250" b="1" u="sng">
                 <a:solidFill>
@@ -4822,7 +4822,7 @@
             </a:r>
           </a:p>
           <a:p>
-            <a:pPr>
+            <a:pPr algn="l">
               <a:spcBef>
                 <a:spcPts val="300"/>
               </a:spcBef>
@@ -4847,8 +4847,8 @@
         </p:nvSpPr>
         <p:spPr>
           <a:xfrm>
-            <a:off x="7366000" y="5511800"/>
-            <a:ext cx="4724400" cy="508000"/>
+            <a:off x="7569200" y="5791200"/>
+            <a:ext cx="4521200" cy="304800"/>
           </a:xfrm>
           <a:prstGeom prst="rect">
             <a:avLst/>
@@ -4873,7 +4873,7 @@
                 </a:solidFill>
                 <a:latin typeface="Arial"/>
               </a:rPr>
-              <a:t>Reproducible build — git 263bec9</a:t>
+              <a:t>Reproducible build — git 5da6698</a:t>
             </a:r>
           </a:p>
         </p:txBody>
@@ -5120,8 +5120,8 @@
         </p:nvSpPr>
         <p:spPr>
           <a:xfrm>
-            <a:off x="101600" y="1168400"/>
-            <a:ext cx="11988800" cy="508000"/>
+            <a:off x="279400" y="1168400"/>
+            <a:ext cx="11811000" cy="508000"/>
           </a:xfrm>
           <a:prstGeom prst="rect">
             <a:avLst/>
@@ -5683,7 +5683,7 @@
           <a:bodyPr rtlCol="0" anchor="t" wrap="square" lIns="114300" rIns="114300" tIns="76200" bIns="76200"/>
           <a:lstStyle/>
           <a:p>
-            <a:pPr algn="ctr"/>
+            <a:pPr algn="l"/>
             <a:r>
               <a:rPr sz="1250" b="1" u="sng">
                 <a:solidFill>
@@ -5695,7 +5695,7 @@
             </a:r>
           </a:p>
           <a:p>
-            <a:pPr>
+            <a:pPr algn="l">
               <a:spcBef>
                 <a:spcPts val="300"/>
               </a:spcBef>
@@ -5954,8 +5954,8 @@
         </p:nvSpPr>
         <p:spPr>
           <a:xfrm>
-            <a:off x="101600" y="1168400"/>
-            <a:ext cx="11988800" cy="508000"/>
+            <a:off x="279400" y="1168400"/>
+            <a:ext cx="11811000" cy="508000"/>
           </a:xfrm>
           <a:prstGeom prst="rect">
             <a:avLst/>
@@ -6113,8 +6113,8 @@
         </p:nvSpPr>
         <p:spPr>
           <a:xfrm>
-            <a:off x="4064000" y="4368800"/>
-            <a:ext cx="4191000" cy="762000"/>
+            <a:off x="4064000" y="4597400"/>
+            <a:ext cx="4191000" cy="787400"/>
           </a:xfrm>
           <a:prstGeom prst="rect">
             <a:avLst/>
@@ -6168,8 +6168,8 @@
         </p:nvSpPr>
         <p:spPr>
           <a:xfrm>
-            <a:off x="8432800" y="4368800"/>
-            <a:ext cx="3657600" cy="762000"/>
+            <a:off x="8432800" y="4597400"/>
+            <a:ext cx="3657600" cy="787400"/>
           </a:xfrm>
           <a:prstGeom prst="rect">
             <a:avLst/>
@@ -6259,7 +6259,7 @@
           <a:bodyPr rtlCol="0" anchor="t" wrap="square" lIns="114300" rIns="114300" tIns="76200" bIns="76200"/>
           <a:lstStyle/>
           <a:p>
-            <a:pPr algn="ctr"/>
+            <a:pPr algn="l"/>
             <a:r>
               <a:rPr sz="1250" b="1" u="sng">
                 <a:solidFill>
@@ -6271,7 +6271,7 @@
             </a:r>
           </a:p>
           <a:p>
-            <a:pPr>
+            <a:pPr algn="l">
               <a:spcBef>
                 <a:spcPts val="300"/>
               </a:spcBef>
@@ -6530,8 +6530,8 @@
         </p:nvSpPr>
         <p:spPr>
           <a:xfrm>
-            <a:off x="101600" y="1168400"/>
-            <a:ext cx="11988800" cy="508000"/>
+            <a:off x="279400" y="1168400"/>
+            <a:ext cx="11811000" cy="508000"/>
           </a:xfrm>
           <a:prstGeom prst="rect">
             <a:avLst/>
@@ -7203,7 +7203,7 @@
           <a:bodyPr rtlCol="0" anchor="t" wrap="square" lIns="114300" rIns="114300" tIns="76200" bIns="76200"/>
           <a:lstStyle/>
           <a:p>
-            <a:pPr algn="ctr"/>
+            <a:pPr algn="l"/>
             <a:r>
               <a:rPr sz="1250" b="1" u="sng">
                 <a:solidFill>
@@ -7215,7 +7215,7 @@
             </a:r>
           </a:p>
           <a:p>
-            <a:pPr>
+            <a:pPr algn="l">
               <a:spcBef>
                 <a:spcPts val="300"/>
               </a:spcBef>
@@ -7276,7 +7276,7 @@
           <a:bodyPr rtlCol="0" anchor="t" wrap="square" lIns="114300" rIns="114300" tIns="76200" bIns="76200"/>
           <a:lstStyle/>
           <a:p>
-            <a:pPr algn="ctr"/>
+            <a:pPr algn="l"/>
             <a:r>
               <a:rPr sz="1250" b="1" u="sng">
                 <a:solidFill>
@@ -7288,7 +7288,7 @@
             </a:r>
           </a:p>
           <a:p>
-            <a:pPr>
+            <a:pPr algn="l">
               <a:spcBef>
                 <a:spcPts val="300"/>
               </a:spcBef>
